--- a/BusraDemir_NazeninTatar_BIM322_Sunum.pptx
+++ b/BusraDemir_NazeninTatar_BIM322_Sunum.pptx
@@ -47332,8 +47332,8 @@
         </p:nvSpPr>
         <p:spPr>
           <a:xfrm>
-            <a:off x="658368" y="1901952"/>
-            <a:ext cx="11247120" cy="420624"/>
+            <a:off x="644603" y="1904902"/>
+            <a:ext cx="6263542" cy="353943"/>
           </a:xfrm>
           <a:prstGeom prst="rect">
             <a:avLst/>
@@ -47348,12 +47348,28 @@
           <a:p>
             <a:pPr algn="l"/>
             <a:r>
-              <a:rPr sz="1700" b="0" i="0">
+              <a:rPr sz="1700" b="0" i="0" dirty="0">
                 <a:solidFill>
                   <a:srgbClr val="212529"/>
                 </a:solidFill>
               </a:rPr>
-              <a:t>4 CSV dosyası:  2× Generation Data,  2× Weather Sensor Data</a:t>
+              <a:t>4 CSV </a:t>
+            </a:r>
+            <a:r>
+              <a:rPr sz="1700" b="0" i="0" dirty="0" err="1">
+                <a:solidFill>
+                  <a:srgbClr val="212529"/>
+                </a:solidFill>
+              </a:rPr>
+              <a:t>dosyası</a:t>
+            </a:r>
+            <a:r>
+              <a:rPr sz="1700" b="0" i="0" dirty="0">
+                <a:solidFill>
+                  <a:srgbClr val="212529"/>
+                </a:solidFill>
+              </a:rPr>
+              <a:t>:  2× Generation Data,  2× Weather Sensor Data</a:t>
             </a:r>
           </a:p>
         </p:txBody>
@@ -49245,7 +49261,7 @@
         </p:nvSpPr>
         <p:spPr>
           <a:xfrm>
-            <a:off x="0" y="0"/>
+            <a:off x="-61602" y="73152"/>
             <a:ext cx="109728" cy="1143000"/>
           </a:xfrm>
           <a:prstGeom prst="rect">
@@ -49357,7 +49373,7 @@
         </p:nvSpPr>
         <p:spPr>
           <a:xfrm>
-            <a:off x="320040" y="1261872"/>
+            <a:off x="265176" y="4279393"/>
             <a:ext cx="2788920" cy="1078992"/>
           </a:xfrm>
           <a:prstGeom prst="rect">
@@ -49401,7 +49417,7 @@
         </p:nvSpPr>
         <p:spPr>
           <a:xfrm>
-            <a:off x="320040" y="1261872"/>
+            <a:off x="265176" y="4279393"/>
             <a:ext cx="2788920" cy="64008"/>
           </a:xfrm>
           <a:prstGeom prst="rect">
@@ -49445,7 +49461,7 @@
         </p:nvSpPr>
         <p:spPr>
           <a:xfrm>
-            <a:off x="429768" y="1371600"/>
+            <a:off x="374904" y="4389121"/>
             <a:ext cx="2569464" cy="320040"/>
           </a:xfrm>
           <a:prstGeom prst="rect">
@@ -49461,12 +49477,28 @@
           <a:p>
             <a:pPr algn="l"/>
             <a:r>
-              <a:rPr sz="1500" b="1" i="0">
+              <a:rPr sz="1500" b="1" i="0" dirty="0">
                 <a:solidFill>
                   <a:srgbClr val="1B4332"/>
                 </a:solidFill>
               </a:rPr>
-              <a:t>AC_POWER  (hedef)</a:t>
+              <a:t>AC_POWER  (</a:t>
+            </a:r>
+            <a:r>
+              <a:rPr sz="1500" b="1" i="0" dirty="0" err="1">
+                <a:solidFill>
+                  <a:srgbClr val="1B4332"/>
+                </a:solidFill>
+              </a:rPr>
+              <a:t>hedef</a:t>
+            </a:r>
+            <a:r>
+              <a:rPr sz="1500" b="1" i="0" dirty="0">
+                <a:solidFill>
+                  <a:srgbClr val="1B4332"/>
+                </a:solidFill>
+              </a:rPr>
+              <a:t>)</a:t>
             </a:r>
           </a:p>
         </p:txBody>
@@ -49479,7 +49511,7 @@
         </p:nvSpPr>
         <p:spPr>
           <a:xfrm>
-            <a:off x="383921" y="1627632"/>
+            <a:off x="329057" y="4645153"/>
             <a:ext cx="2569464" cy="658368"/>
           </a:xfrm>
           <a:prstGeom prst="rect">
@@ -49515,7 +49547,7 @@
         </p:nvSpPr>
         <p:spPr>
           <a:xfrm>
-            <a:off x="3218688" y="1261872"/>
+            <a:off x="3163824" y="4279393"/>
             <a:ext cx="2788920" cy="1078992"/>
           </a:xfrm>
           <a:prstGeom prst="rect">
@@ -49559,7 +49591,7 @@
         </p:nvSpPr>
         <p:spPr>
           <a:xfrm>
-            <a:off x="3218688" y="1261872"/>
+            <a:off x="3163824" y="4279393"/>
             <a:ext cx="2788920" cy="64008"/>
           </a:xfrm>
           <a:prstGeom prst="rect">
@@ -49603,7 +49635,7 @@
         </p:nvSpPr>
         <p:spPr>
           <a:xfrm>
-            <a:off x="3328416" y="1371600"/>
+            <a:off x="3273552" y="4389121"/>
             <a:ext cx="2569464" cy="320040"/>
           </a:xfrm>
           <a:prstGeom prst="rect">
@@ -49637,7 +49669,7 @@
         </p:nvSpPr>
         <p:spPr>
           <a:xfrm>
-            <a:off x="3328416" y="1591056"/>
+            <a:off x="3273552" y="4608577"/>
             <a:ext cx="2569464" cy="658368"/>
           </a:xfrm>
           <a:prstGeom prst="rect">
@@ -49673,7 +49705,7 @@
         </p:nvSpPr>
         <p:spPr>
           <a:xfrm>
-            <a:off x="6117336" y="1261872"/>
+            <a:off x="6062472" y="4279393"/>
             <a:ext cx="2788920" cy="1078992"/>
           </a:xfrm>
           <a:prstGeom prst="rect">
@@ -49717,7 +49749,7 @@
         </p:nvSpPr>
         <p:spPr>
           <a:xfrm>
-            <a:off x="6117336" y="1261872"/>
+            <a:off x="6062472" y="4279393"/>
             <a:ext cx="2788920" cy="64008"/>
           </a:xfrm>
           <a:prstGeom prst="rect">
@@ -49761,7 +49793,7 @@
         </p:nvSpPr>
         <p:spPr>
           <a:xfrm>
-            <a:off x="6227064" y="1371600"/>
+            <a:off x="6172200" y="4389121"/>
             <a:ext cx="2569464" cy="320040"/>
           </a:xfrm>
           <a:prstGeom prst="rect">
@@ -49795,7 +49827,7 @@
         </p:nvSpPr>
         <p:spPr>
           <a:xfrm>
-            <a:off x="6227064" y="1577340"/>
+            <a:off x="6172200" y="4594861"/>
             <a:ext cx="2569464" cy="658368"/>
           </a:xfrm>
           <a:prstGeom prst="rect">
@@ -49831,7 +49863,7 @@
         </p:nvSpPr>
         <p:spPr>
           <a:xfrm>
-            <a:off x="9015984" y="1261872"/>
+            <a:off x="8961120" y="4279393"/>
             <a:ext cx="2788920" cy="1124712"/>
           </a:xfrm>
           <a:prstGeom prst="rect">
@@ -49875,7 +49907,7 @@
         </p:nvSpPr>
         <p:spPr>
           <a:xfrm>
-            <a:off x="9015984" y="1261872"/>
+            <a:off x="8961120" y="4279393"/>
             <a:ext cx="2788920" cy="64008"/>
           </a:xfrm>
           <a:prstGeom prst="rect">
@@ -49919,7 +49951,7 @@
         </p:nvSpPr>
         <p:spPr>
           <a:xfrm>
-            <a:off x="9125712" y="1371600"/>
+            <a:off x="9070848" y="4389121"/>
             <a:ext cx="2569464" cy="320040"/>
           </a:xfrm>
           <a:prstGeom prst="rect">
@@ -49953,7 +49985,7 @@
         </p:nvSpPr>
         <p:spPr>
           <a:xfrm>
-            <a:off x="9125712" y="1527296"/>
+            <a:off x="9070848" y="4544817"/>
             <a:ext cx="2569464" cy="658368"/>
           </a:xfrm>
           <a:prstGeom prst="rect">
@@ -49989,7 +50021,7 @@
         </p:nvSpPr>
         <p:spPr>
           <a:xfrm>
-            <a:off x="320040" y="2359152"/>
+            <a:off x="265176" y="5376673"/>
             <a:ext cx="11548872" cy="411480"/>
           </a:xfrm>
           <a:prstGeom prst="rect">
@@ -50033,7 +50065,7 @@
         </p:nvSpPr>
         <p:spPr>
           <a:xfrm>
-            <a:off x="457200" y="2395728"/>
+            <a:off x="402336" y="5413249"/>
             <a:ext cx="11338560" cy="347472"/>
           </a:xfrm>
           <a:prstGeom prst="rect">
@@ -50061,148 +50093,70 @@
       </p:sp>
       <p:sp>
         <p:nvSpPr>
-          <p:cNvPr id="24" name="Rectangle 23"/>
-          <p:cNvSpPr/>
-          <p:nvPr/>
-        </p:nvSpPr>
-        <p:spPr>
-          <a:xfrm>
-            <a:off x="320040" y="3154680"/>
-            <a:ext cx="5623560" cy="3429000"/>
-          </a:xfrm>
-          <a:prstGeom prst="rect">
-            <a:avLst/>
-          </a:prstGeom>
-          <a:solidFill>
-            <a:srgbClr val="E9ECEF"/>
-          </a:solidFill>
-          <a:ln w="19050">
-            <a:solidFill>
-              <a:srgbClr val="ADB5BD"/>
-            </a:solidFill>
-          </a:ln>
-        </p:spPr>
-        <p:style>
-          <a:lnRef idx="1">
-            <a:schemeClr val="accent1"/>
-          </a:lnRef>
-          <a:fillRef idx="3">
-            <a:schemeClr val="accent1"/>
-          </a:fillRef>
-          <a:effectRef idx="2">
-            <a:schemeClr val="accent1"/>
-          </a:effectRef>
-          <a:fontRef idx="minor">
-            <a:schemeClr val="lt1"/>
-          </a:fontRef>
-        </p:style>
-        <p:txBody>
-          <a:bodyPr rtlCol="0" anchor="ctr"/>
-          <a:lstStyle/>
-          <a:p>
-            <a:pPr algn="ctr"/>
-            <a:endParaRPr/>
-          </a:p>
-        </p:txBody>
-      </p:sp>
-      <p:sp>
-        <p:nvSpPr>
-          <p:cNvPr id="25" name="Rectangle 24"/>
-          <p:cNvSpPr/>
-          <p:nvPr/>
-        </p:nvSpPr>
-        <p:spPr>
-          <a:xfrm>
-            <a:off x="411480" y="3246120"/>
-            <a:ext cx="5440680" cy="36576"/>
-          </a:xfrm>
-          <a:prstGeom prst="rect">
-            <a:avLst/>
-          </a:prstGeom>
-          <a:solidFill>
-            <a:srgbClr val="ADB5BD"/>
-          </a:solidFill>
-          <a:ln>
-            <a:noFill/>
-          </a:ln>
-        </p:spPr>
-        <p:style>
-          <a:lnRef idx="1">
-            <a:schemeClr val="accent1"/>
-          </a:lnRef>
-          <a:fillRef idx="3">
-            <a:schemeClr val="accent1"/>
-          </a:fillRef>
-          <a:effectRef idx="2">
-            <a:schemeClr val="accent1"/>
-          </a:effectRef>
-          <a:fontRef idx="minor">
-            <a:schemeClr val="lt1"/>
-          </a:fontRef>
-        </p:style>
-        <p:txBody>
-          <a:bodyPr rtlCol="0" anchor="ctr"/>
-          <a:lstStyle/>
-          <a:p>
-            <a:pPr algn="ctr"/>
-            <a:endParaRPr/>
-          </a:p>
-        </p:txBody>
-      </p:sp>
-      <p:sp>
-        <p:nvSpPr>
-          <p:cNvPr id="26" name="Rectangle 25"/>
-          <p:cNvSpPr/>
-          <p:nvPr/>
-        </p:nvSpPr>
-        <p:spPr>
-          <a:xfrm>
-            <a:off x="411480" y="6455664"/>
-            <a:ext cx="5440680" cy="36576"/>
-          </a:xfrm>
-          <a:prstGeom prst="rect">
-            <a:avLst/>
-          </a:prstGeom>
-          <a:solidFill>
-            <a:srgbClr val="ADB5BD"/>
-          </a:solidFill>
-          <a:ln>
-            <a:noFill/>
-          </a:ln>
-        </p:spPr>
-        <p:style>
-          <a:lnRef idx="1">
-            <a:schemeClr val="accent1"/>
-          </a:lnRef>
-          <a:fillRef idx="3">
-            <a:schemeClr val="accent1"/>
-          </a:fillRef>
-          <a:effectRef idx="2">
-            <a:schemeClr val="accent1"/>
-          </a:effectRef>
-          <a:fontRef idx="minor">
-            <a:schemeClr val="lt1"/>
-          </a:fontRef>
-        </p:style>
-        <p:txBody>
-          <a:bodyPr rtlCol="0" anchor="ctr"/>
-          <a:lstStyle/>
-          <a:p>
-            <a:pPr algn="ctr"/>
-            <a:endParaRPr/>
-          </a:p>
-        </p:txBody>
-      </p:sp>
-      <p:sp>
-        <p:nvSpPr>
-          <p:cNvPr id="27" name="TextBox 26"/>
+          <p:cNvPr id="30" name="Rectangle 5">
+            <a:extLst>
+              <a:ext uri="{FF2B5EF4-FFF2-40B4-BE49-F238E27FC236}">
+                <a16:creationId xmlns:a16="http://schemas.microsoft.com/office/drawing/2014/main" id="{A2AF5557-20F9-B0FC-5F88-3D032CEEFF55}"/>
+              </a:ext>
+            </a:extLst>
+          </p:cNvPr>
+          <p:cNvSpPr/>
+          <p:nvPr/>
+        </p:nvSpPr>
+        <p:spPr>
+          <a:xfrm>
+            <a:off x="770341" y="1444751"/>
+            <a:ext cx="10517091" cy="2377441"/>
+          </a:xfrm>
+          <a:prstGeom prst="rect">
+            <a:avLst/>
+          </a:prstGeom>
+          <a:solidFill>
+            <a:srgbClr val="D8F3DC"/>
+          </a:solidFill>
+          <a:ln>
+            <a:noFill/>
+          </a:ln>
+        </p:spPr>
+        <p:style>
+          <a:lnRef idx="1">
+            <a:schemeClr val="accent1"/>
+          </a:lnRef>
+          <a:fillRef idx="3">
+            <a:schemeClr val="accent1"/>
+          </a:fillRef>
+          <a:effectRef idx="2">
+            <a:schemeClr val="accent1"/>
+          </a:effectRef>
+          <a:fontRef idx="minor">
+            <a:schemeClr val="lt1"/>
+          </a:fontRef>
+        </p:style>
+        <p:txBody>
+          <a:bodyPr rtlCol="0" anchor="ctr"/>
+          <a:lstStyle/>
+          <a:p>
+            <a:pPr algn="ctr"/>
+            <a:endParaRPr/>
+          </a:p>
+        </p:txBody>
+      </p:sp>
+      <p:sp>
+        <p:nvSpPr>
+          <p:cNvPr id="29" name="Metin kutusu 28">
+            <a:extLst>
+              <a:ext uri="{FF2B5EF4-FFF2-40B4-BE49-F238E27FC236}">
+                <a16:creationId xmlns:a16="http://schemas.microsoft.com/office/drawing/2014/main" id="{4C8D1C4A-90A4-D563-177D-9F609393B062}"/>
+              </a:ext>
+            </a:extLst>
+          </p:cNvPr>
           <p:cNvSpPr txBox="1"/>
           <p:nvPr/>
         </p:nvSpPr>
         <p:spPr>
           <a:xfrm>
-            <a:off x="320040" y="3337560"/>
-            <a:ext cx="5623560" cy="347472"/>
+            <a:off x="1202961" y="1876296"/>
+            <a:ext cx="8759310" cy="1461939"/>
           </a:xfrm>
           <a:prstGeom prst="rect">
             <a:avLst/>
@@ -50215,80 +50169,347 @@
           </a:bodyPr>
           <a:lstStyle/>
           <a:p>
-            <a:pPr algn="ctr"/>
-            <a:r>
-              <a:rPr sz="1300" b="1" i="0">
-                <a:solidFill>
-                  <a:srgbClr val="ADB5BD"/>
-                </a:solidFill>
-              </a:rPr>
-              <a:t>[ GÖRSEL ALANI ]</a:t>
-            </a:r>
-          </a:p>
-        </p:txBody>
-      </p:sp>
-      <p:pic>
-        <p:nvPicPr>
-          <p:cNvPr id="39" name="Resim 38">
+            <a:pPr algn="l">
+              <a:buFont typeface="Arial" panose="020B0604020202020204" pitchFamily="34" charset="0"/>
+              <a:buChar char="•"/>
+            </a:pPr>
+            <a:r>
+              <a:rPr lang="tr-TR" sz="1500" b="1" dirty="0">
+                <a:solidFill>
+                  <a:srgbClr val="1B4332"/>
+                </a:solidFill>
+              </a:rPr>
+              <a:t>DC </a:t>
+            </a:r>
+            <a:r>
+              <a:rPr lang="tr-TR" sz="1500" b="1" dirty="0" err="1">
+                <a:solidFill>
+                  <a:srgbClr val="1B4332"/>
+                </a:solidFill>
+              </a:rPr>
+              <a:t>Power</a:t>
+            </a:r>
+            <a:r>
+              <a:rPr lang="tr-TR" sz="1500" b="1" dirty="0">
+                <a:solidFill>
+                  <a:srgbClr val="1B4332"/>
+                </a:solidFill>
+              </a:rPr>
+              <a:t> </a:t>
+            </a:r>
+            <a:r>
+              <a:rPr lang="tr-TR" sz="1400" dirty="0">
+                <a:solidFill>
+                  <a:srgbClr val="212529"/>
+                </a:solidFill>
+              </a:rPr>
+              <a:t>Güneş panelleri tarafından güneş ışığından doğrudan üretilen ve henüz dönüştürülmemiş ham elektrik gücüdür.</a:t>
+            </a:r>
+          </a:p>
+          <a:p>
+            <a:pPr algn="l">
+              <a:buFont typeface="Arial" panose="020B0604020202020204" pitchFamily="34" charset="0"/>
+              <a:buChar char="•"/>
+            </a:pPr>
+            <a:r>
+              <a:rPr lang="tr-TR" sz="1500" b="1" dirty="0">
+                <a:solidFill>
+                  <a:srgbClr val="1B4332"/>
+                </a:solidFill>
+              </a:rPr>
+              <a:t>AC </a:t>
+            </a:r>
+            <a:r>
+              <a:rPr lang="tr-TR" sz="1500" b="1" dirty="0" err="1">
+                <a:solidFill>
+                  <a:srgbClr val="1B4332"/>
+                </a:solidFill>
+              </a:rPr>
+              <a:t>Power:</a:t>
+            </a:r>
+            <a:r>
+              <a:rPr lang="tr-TR" sz="1400" dirty="0" err="1">
+                <a:solidFill>
+                  <a:srgbClr val="212529"/>
+                </a:solidFill>
+              </a:rPr>
+              <a:t>Üretilen</a:t>
+            </a:r>
+            <a:r>
+              <a:rPr lang="tr-TR" sz="1400" dirty="0">
+                <a:solidFill>
+                  <a:srgbClr val="212529"/>
+                </a:solidFill>
+              </a:rPr>
+              <a:t> DC gücün, inverter cihazı sayesinde şebekeye veya ev kullanımına uygun hale getirilmiş şeklidir.</a:t>
+            </a:r>
+          </a:p>
+          <a:p>
+            <a:pPr algn="l">
+              <a:buFont typeface="Arial" panose="020B0604020202020204" pitchFamily="34" charset="0"/>
+              <a:buChar char="•"/>
+            </a:pPr>
+            <a:r>
+              <a:rPr lang="tr-TR" sz="1500" b="1" dirty="0" err="1">
+                <a:solidFill>
+                  <a:srgbClr val="1B4332"/>
+                </a:solidFill>
+              </a:rPr>
+              <a:t>Irradiation</a:t>
+            </a:r>
+            <a:r>
+              <a:rPr lang="tr-TR" sz="1400" b="1" dirty="0">
+                <a:solidFill>
+                  <a:srgbClr val="212529"/>
+                </a:solidFill>
+              </a:rPr>
+              <a:t>: </a:t>
+            </a:r>
+            <a:r>
+              <a:rPr lang="tr-TR" sz="1400" dirty="0">
+                <a:solidFill>
+                  <a:srgbClr val="212529"/>
+                </a:solidFill>
+              </a:rPr>
+              <a:t>Panellerin bulunduğu birim alana düşen güneş enerjisi miktarıdır.</a:t>
+            </a:r>
+          </a:p>
+          <a:p>
+            <a:pPr algn="l">
+              <a:buFont typeface="Arial" panose="020B0604020202020204" pitchFamily="34" charset="0"/>
+              <a:buChar char="•"/>
+            </a:pPr>
+            <a:r>
+              <a:rPr lang="tr-TR" sz="1500" b="1" dirty="0" err="1">
+                <a:solidFill>
+                  <a:srgbClr val="1B4332"/>
+                </a:solidFill>
+              </a:rPr>
+              <a:t>Module</a:t>
+            </a:r>
+            <a:r>
+              <a:rPr lang="tr-TR" sz="1500" b="1" dirty="0">
+                <a:solidFill>
+                  <a:srgbClr val="1B4332"/>
+                </a:solidFill>
+              </a:rPr>
+              <a:t> </a:t>
+            </a:r>
+            <a:r>
+              <a:rPr lang="tr-TR" sz="1500" b="1" dirty="0" err="1">
+                <a:solidFill>
+                  <a:srgbClr val="1B4332"/>
+                </a:solidFill>
+              </a:rPr>
+              <a:t>Temperature:</a:t>
+            </a:r>
+            <a:r>
+              <a:rPr lang="tr-TR" sz="1400" dirty="0" err="1">
+                <a:solidFill>
+                  <a:srgbClr val="212529"/>
+                </a:solidFill>
+              </a:rPr>
+              <a:t>Güneş</a:t>
+            </a:r>
+            <a:r>
+              <a:rPr lang="tr-TR" sz="1400" dirty="0">
+                <a:solidFill>
+                  <a:srgbClr val="212529"/>
+                </a:solidFill>
+              </a:rPr>
+              <a:t> panelinin kendi yüzey çalışma sıcaklığıdır </a:t>
+            </a:r>
+          </a:p>
+          <a:p>
+            <a:pPr algn="l">
+              <a:buFont typeface="Arial" panose="020B0604020202020204" pitchFamily="34" charset="0"/>
+              <a:buChar char="•"/>
+            </a:pPr>
+            <a:r>
+              <a:rPr lang="tr-TR" sz="1500" b="1" dirty="0" err="1">
+                <a:solidFill>
+                  <a:srgbClr val="1B4332"/>
+                </a:solidFill>
+              </a:rPr>
+              <a:t>Ambient</a:t>
+            </a:r>
+            <a:r>
+              <a:rPr lang="tr-TR" sz="1400" dirty="0">
+                <a:solidFill>
+                  <a:srgbClr val="212529"/>
+                </a:solidFill>
+              </a:rPr>
+              <a:t> </a:t>
+            </a:r>
+            <a:r>
+              <a:rPr lang="tr-TR" sz="1500" b="1" dirty="0" err="1">
+                <a:solidFill>
+                  <a:srgbClr val="1B4332"/>
+                </a:solidFill>
+              </a:rPr>
+              <a:t>Temperature</a:t>
+            </a:r>
+            <a:r>
+              <a:rPr lang="tr-TR" sz="1400" dirty="0">
+                <a:solidFill>
+                  <a:srgbClr val="212529"/>
+                </a:solidFill>
+              </a:rPr>
+              <a:t>: Güneş enerjisi santralinin bulunduğu çevrenin (havanın) genel sıcaklığıdır.</a:t>
+            </a:r>
+          </a:p>
+        </p:txBody>
+      </p:sp>
+      <p:sp>
+        <p:nvSpPr>
+          <p:cNvPr id="31" name="Rectangle 6">
             <a:extLst>
               <a:ext uri="{FF2B5EF4-FFF2-40B4-BE49-F238E27FC236}">
-                <a16:creationId xmlns:a16="http://schemas.microsoft.com/office/drawing/2014/main" id="{9E31623A-49B5-0D67-15FA-4DA77B9277D7}"/>
+                <a16:creationId xmlns:a16="http://schemas.microsoft.com/office/drawing/2014/main" id="{278B1C93-F57F-5C34-D13E-D13A33003827}"/>
               </a:ext>
             </a:extLst>
           </p:cNvPr>
-          <p:cNvPicPr>
-            <a:picLocks noChangeAspect="1"/>
-          </p:cNvPicPr>
-          <p:nvPr/>
-        </p:nvPicPr>
-        <p:blipFill>
-          <a:blip r:embed="rId2"/>
-          <a:srcRect t="67734" r="62790"/>
-          <a:stretch>
-            <a:fillRect/>
-          </a:stretch>
-        </p:blipFill>
-        <p:spPr>
-          <a:xfrm>
-            <a:off x="7924801" y="3053775"/>
-            <a:ext cx="4101788" cy="2822508"/>
-          </a:xfrm>
-          <a:prstGeom prst="rect">
-            <a:avLst/>
-          </a:prstGeom>
-        </p:spPr>
-      </p:pic>
-      <p:pic>
-        <p:nvPicPr>
-          <p:cNvPr id="44" name="Resim 43">
+          <p:cNvSpPr/>
+          <p:nvPr/>
+        </p:nvSpPr>
+        <p:spPr>
+          <a:xfrm>
+            <a:off x="770341" y="1403604"/>
+            <a:ext cx="10605582" cy="45719"/>
+          </a:xfrm>
+          <a:prstGeom prst="rect">
+            <a:avLst/>
+          </a:prstGeom>
+          <a:solidFill>
+            <a:srgbClr val="40916C"/>
+          </a:solidFill>
+          <a:ln>
+            <a:noFill/>
+          </a:ln>
+        </p:spPr>
+        <p:style>
+          <a:lnRef idx="1">
+            <a:schemeClr val="accent1"/>
+          </a:lnRef>
+          <a:fillRef idx="3">
+            <a:schemeClr val="accent1"/>
+          </a:fillRef>
+          <a:effectRef idx="2">
+            <a:schemeClr val="accent1"/>
+          </a:effectRef>
+          <a:fontRef idx="minor">
+            <a:schemeClr val="lt1"/>
+          </a:fontRef>
+        </p:style>
+        <p:txBody>
+          <a:bodyPr rtlCol="0" anchor="ctr"/>
+          <a:lstStyle/>
+          <a:p>
+            <a:pPr algn="ctr"/>
+            <a:endParaRPr/>
+          </a:p>
+        </p:txBody>
+      </p:sp>
+      <p:sp>
+        <p:nvSpPr>
+          <p:cNvPr id="33" name="Rectangle 10">
             <a:extLst>
               <a:ext uri="{FF2B5EF4-FFF2-40B4-BE49-F238E27FC236}">
-                <a16:creationId xmlns:a16="http://schemas.microsoft.com/office/drawing/2014/main" id="{58C6C1A5-AFB9-A303-114B-C7D57EF82FC9}"/>
+                <a16:creationId xmlns:a16="http://schemas.microsoft.com/office/drawing/2014/main" id="{110EAA83-FCCA-161D-BE3C-4F12D7C73ADE}"/>
               </a:ext>
             </a:extLst>
           </p:cNvPr>
-          <p:cNvPicPr>
-            <a:picLocks noChangeAspect="1"/>
-          </p:cNvPicPr>
-          <p:nvPr/>
-        </p:nvPicPr>
-        <p:blipFill>
-          <a:blip r:embed="rId2"/>
-          <a:srcRect b="32805"/>
-          <a:stretch>
-            <a:fillRect/>
-          </a:stretch>
-        </p:blipFill>
-        <p:spPr>
-          <a:xfrm>
-            <a:off x="256032" y="2770632"/>
-            <a:ext cx="7481706" cy="3989430"/>
-          </a:xfrm>
-          <a:prstGeom prst="rect">
-            <a:avLst/>
-          </a:prstGeom>
-        </p:spPr>
-      </p:pic>
+          <p:cNvSpPr/>
+          <p:nvPr/>
+        </p:nvSpPr>
+        <p:spPr>
+          <a:xfrm>
+            <a:off x="770340" y="1441957"/>
+            <a:ext cx="10517091" cy="64008"/>
+          </a:xfrm>
+          <a:prstGeom prst="rect">
+            <a:avLst/>
+          </a:prstGeom>
+          <a:solidFill>
+            <a:srgbClr val="337AB4"/>
+          </a:solidFill>
+          <a:ln>
+            <a:noFill/>
+          </a:ln>
+        </p:spPr>
+        <p:style>
+          <a:lnRef idx="1">
+            <a:schemeClr val="accent1"/>
+          </a:lnRef>
+          <a:fillRef idx="3">
+            <a:schemeClr val="accent1"/>
+          </a:fillRef>
+          <a:effectRef idx="2">
+            <a:schemeClr val="accent1"/>
+          </a:effectRef>
+          <a:fontRef idx="minor">
+            <a:schemeClr val="lt1"/>
+          </a:fontRef>
+        </p:style>
+        <p:txBody>
+          <a:bodyPr rtlCol="0" anchor="ctr"/>
+          <a:lstStyle/>
+          <a:p>
+            <a:pPr algn="ctr"/>
+            <a:endParaRPr/>
+          </a:p>
+        </p:txBody>
+      </p:sp>
+      <p:sp>
+        <p:nvSpPr>
+          <p:cNvPr id="34" name="Rectangle 14">
+            <a:extLst>
+              <a:ext uri="{FF2B5EF4-FFF2-40B4-BE49-F238E27FC236}">
+                <a16:creationId xmlns:a16="http://schemas.microsoft.com/office/drawing/2014/main" id="{380CB54B-0A15-5137-3E78-897E88BBD964}"/>
+              </a:ext>
+            </a:extLst>
+          </p:cNvPr>
+          <p:cNvSpPr/>
+          <p:nvPr/>
+        </p:nvSpPr>
+        <p:spPr>
+          <a:xfrm>
+            <a:off x="770339" y="1512314"/>
+            <a:ext cx="10517090" cy="45719"/>
+          </a:xfrm>
+          <a:prstGeom prst="rect">
+            <a:avLst/>
+          </a:prstGeom>
+          <a:solidFill>
+            <a:srgbClr val="F5A623"/>
+          </a:solidFill>
+          <a:ln>
+            <a:noFill/>
+          </a:ln>
+        </p:spPr>
+        <p:style>
+          <a:lnRef idx="1">
+            <a:schemeClr val="accent1"/>
+          </a:lnRef>
+          <a:fillRef idx="3">
+            <a:schemeClr val="accent1"/>
+          </a:fillRef>
+          <a:effectRef idx="2">
+            <a:schemeClr val="accent1"/>
+          </a:effectRef>
+          <a:fontRef idx="minor">
+            <a:schemeClr val="lt1"/>
+          </a:fontRef>
+        </p:style>
+        <p:txBody>
+          <a:bodyPr rtlCol="0" anchor="ctr"/>
+          <a:lstStyle/>
+          <a:p>
+            <a:pPr algn="ctr"/>
+            <a:endParaRPr/>
+          </a:p>
+        </p:txBody>
+      </p:sp>
     </p:spTree>
   </p:cSld>
   <p:clrMapOvr>
@@ -50300,6 +50521,14 @@
 <file path=ppt/slides/slide5.xml><?xml version="1.0" encoding="utf-8"?>
 <p:sld xmlns:a="http://schemas.openxmlformats.org/drawingml/2006/main" xmlns:r="http://schemas.openxmlformats.org/officeDocument/2006/relationships" xmlns:p="http://schemas.openxmlformats.org/presentationml/2006/main">
   <p:cSld>
+    <p:bg>
+      <p:bgPr>
+        <a:solidFill>
+          <a:schemeClr val="bg1"/>
+        </a:solidFill>
+        <a:effectLst/>
+      </p:bgPr>
+    </p:bg>
     <p:spTree>
       <p:nvGrpSpPr>
         <p:cNvPr id="1" name=""/>
@@ -50316,10 +50545,10 @@
       </p:grpSpPr>
       <p:sp>
         <p:nvSpPr>
-          <p:cNvPr id="5" name="Rectangle 1">
+          <p:cNvPr id="12" name="Rectangle 5">
             <a:extLst>
               <a:ext uri="{FF2B5EF4-FFF2-40B4-BE49-F238E27FC236}">
-                <a16:creationId xmlns:a16="http://schemas.microsoft.com/office/drawing/2014/main" id="{FC1619ED-723F-BBB8-2219-CE8C90360A1F}"/>
+                <a16:creationId xmlns:a16="http://schemas.microsoft.com/office/drawing/2014/main" id="{FC2D511A-270B-1CFC-86E6-04A2AEC848BB}"/>
               </a:ext>
             </a:extLst>
           </p:cNvPr>
@@ -50328,139 +50557,373 @@
         </p:nvSpPr>
         <p:spPr>
           <a:xfrm>
-            <a:off x="0" y="0"/>
-            <a:ext cx="12188952" cy="1143000"/>
-          </a:xfrm>
-          <a:prstGeom prst="rect">
-            <a:avLst/>
-          </a:prstGeom>
-          <a:solidFill>
-            <a:srgbClr val="1B4332"/>
-          </a:solidFill>
-          <a:ln>
-            <a:noFill/>
-          </a:ln>
-        </p:spPr>
-        <p:style>
-          <a:lnRef idx="1">
-            <a:schemeClr val="accent1"/>
-          </a:lnRef>
-          <a:fillRef idx="3">
-            <a:schemeClr val="accent1"/>
-          </a:fillRef>
-          <a:effectRef idx="2">
-            <a:schemeClr val="accent1"/>
-          </a:effectRef>
-          <a:fontRef idx="minor">
-            <a:schemeClr val="lt1"/>
-          </a:fontRef>
-        </p:style>
-        <p:txBody>
-          <a:bodyPr rtlCol="0" anchor="ctr"/>
-          <a:lstStyle/>
-          <a:p>
-            <a:pPr algn="ctr"/>
-            <a:endParaRPr/>
-          </a:p>
-        </p:txBody>
-      </p:sp>
-      <p:sp>
-        <p:nvSpPr>
-          <p:cNvPr id="2" name="Rectangle 5">
+            <a:off x="-1" y="0"/>
+            <a:ext cx="12188825" cy="7098890"/>
+          </a:xfrm>
+          <a:prstGeom prst="rect">
+            <a:avLst/>
+          </a:prstGeom>
+          <a:solidFill>
+            <a:srgbClr val="D8F3DC"/>
+          </a:solidFill>
+          <a:ln>
+            <a:noFill/>
+          </a:ln>
+        </p:spPr>
+        <p:style>
+          <a:lnRef idx="1">
+            <a:schemeClr val="accent1"/>
+          </a:lnRef>
+          <a:fillRef idx="3">
+            <a:schemeClr val="accent1"/>
+          </a:fillRef>
+          <a:effectRef idx="2">
+            <a:schemeClr val="accent1"/>
+          </a:effectRef>
+          <a:fontRef idx="minor">
+            <a:schemeClr val="lt1"/>
+          </a:fontRef>
+        </p:style>
+        <p:txBody>
+          <a:bodyPr rtlCol="0" anchor="ctr"/>
+          <a:lstStyle/>
+          <a:p>
+            <a:pPr algn="ctr"/>
+            <a:endParaRPr/>
+          </a:p>
+        </p:txBody>
+      </p:sp>
+      <p:sp>
+        <p:nvSpPr>
+          <p:cNvPr id="40" name="Rectangle 39">
             <a:extLst>
               <a:ext uri="{FF2B5EF4-FFF2-40B4-BE49-F238E27FC236}">
-                <a16:creationId xmlns:a16="http://schemas.microsoft.com/office/drawing/2014/main" id="{8E410648-6F1C-1FB7-EF1B-E1E363FAE57B}"/>
+                <a16:creationId xmlns:a16="http://schemas.microsoft.com/office/drawing/2014/main" id="{9527FCEA-6143-4C5E-8C45-8AC9237ADE89}"/>
+              </a:ext>
+              <a:ext uri="{C183D7F6-B498-43B3-948B-1728B52AA6E4}">
+                <adec:decorative xmlns:adec="http://schemas.microsoft.com/office/drawing/2017/decorative" val="1"/>
               </a:ext>
             </a:extLst>
           </p:cNvPr>
-          <p:cNvSpPr/>
-          <p:nvPr/>
-        </p:nvSpPr>
-        <p:spPr>
-          <a:xfrm>
-            <a:off x="0" y="571500"/>
-            <a:ext cx="8295640" cy="3352800"/>
-          </a:xfrm>
-          <a:prstGeom prst="rect">
-            <a:avLst/>
-          </a:prstGeom>
-          <a:solidFill>
-            <a:srgbClr val="D8F3DC"/>
-          </a:solidFill>
-          <a:ln>
-            <a:noFill/>
-          </a:ln>
-        </p:spPr>
-        <p:style>
-          <a:lnRef idx="1">
-            <a:schemeClr val="accent1"/>
-          </a:lnRef>
-          <a:fillRef idx="3">
-            <a:schemeClr val="accent1"/>
-          </a:fillRef>
-          <a:effectRef idx="2">
-            <a:schemeClr val="accent1"/>
-          </a:effectRef>
-          <a:fontRef idx="minor">
-            <a:schemeClr val="lt1"/>
-          </a:fontRef>
-        </p:style>
-        <p:txBody>
-          <a:bodyPr rtlCol="0" anchor="ctr"/>
-          <a:lstStyle/>
-          <a:p>
-            <a:pPr algn="ctr"/>
-            <a:endParaRPr/>
-          </a:p>
-        </p:txBody>
-      </p:sp>
-      <p:sp>
-        <p:nvSpPr>
-          <p:cNvPr id="3" name="Rectangle 5">
+          <p:cNvSpPr>
+            <a:spLocks noGrp="1" noRot="1" noChangeAspect="1" noMove="1" noResize="1" noEditPoints="1" noAdjustHandles="1" noChangeArrowheads="1" noChangeShapeType="1" noTextEdit="1"/>
+          </p:cNvSpPr>
+          <p:nvPr>
+            <p:extLst>
+              <p:ext uri="{386F3935-93C4-4BCD-93E2-E3B085C9AB24}">
+                <p16:designElem xmlns:p16="http://schemas.microsoft.com/office/powerpoint/2015/main" val="1"/>
+              </p:ext>
+            </p:extLst>
+          </p:nvPr>
+        </p:nvSpPr>
+        <p:spPr>
+          <a:xfrm>
+            <a:off x="0" y="0"/>
+            <a:ext cx="12188825" cy="6858000"/>
+          </a:xfrm>
+          <a:prstGeom prst="rect">
+            <a:avLst/>
+          </a:prstGeom>
+          <a:solidFill>
+            <a:schemeClr val="tx1">
+              <a:lumMod val="50000"/>
+              <a:lumOff val="50000"/>
+              <a:alpha val="30000"/>
+            </a:schemeClr>
+          </a:solidFill>
+          <a:ln>
+            <a:noFill/>
+          </a:ln>
+        </p:spPr>
+        <p:style>
+          <a:lnRef idx="2">
+            <a:schemeClr val="accent1">
+              <a:shade val="50000"/>
+            </a:schemeClr>
+          </a:lnRef>
+          <a:fillRef idx="1">
+            <a:schemeClr val="accent1"/>
+          </a:fillRef>
+          <a:effectRef idx="0">
+            <a:schemeClr val="accent1"/>
+          </a:effectRef>
+          <a:fontRef idx="minor">
+            <a:schemeClr val="lt1"/>
+          </a:fontRef>
+        </p:style>
+        <p:txBody>
+          <a:bodyPr rtlCol="0" anchor="ctr"/>
+          <a:lstStyle/>
+          <a:p>
+            <a:pPr algn="ctr"/>
+            <a:endParaRPr lang="en-US"/>
+          </a:p>
+        </p:txBody>
+      </p:sp>
+      <p:sp>
+        <p:nvSpPr>
+          <p:cNvPr id="42" name="Rectangle 41">
             <a:extLst>
               <a:ext uri="{FF2B5EF4-FFF2-40B4-BE49-F238E27FC236}">
-                <a16:creationId xmlns:a16="http://schemas.microsoft.com/office/drawing/2014/main" id="{9F33AEB2-031B-1C2E-60D1-289561DA6586}"/>
+                <a16:creationId xmlns:a16="http://schemas.microsoft.com/office/drawing/2014/main" id="{1A9F23AD-7A55-49F3-A3EC-743F47F36B0E}"/>
+              </a:ext>
+              <a:ext uri="{C183D7F6-B498-43B3-948B-1728B52AA6E4}">
+                <adec:decorative xmlns:adec="http://schemas.microsoft.com/office/drawing/2017/decorative" val="1"/>
               </a:ext>
             </a:extLst>
           </p:cNvPr>
-          <p:cNvSpPr/>
-          <p:nvPr/>
-        </p:nvSpPr>
-        <p:spPr>
-          <a:xfrm>
-            <a:off x="6802119" y="2415540"/>
-            <a:ext cx="4975225" cy="4107180"/>
-          </a:xfrm>
-          <a:prstGeom prst="rect">
-            <a:avLst/>
-          </a:prstGeom>
-          <a:solidFill>
-            <a:srgbClr val="D8F3DC"/>
-          </a:solidFill>
-          <a:ln>
-            <a:noFill/>
-          </a:ln>
-        </p:spPr>
-        <p:style>
-          <a:lnRef idx="1">
-            <a:schemeClr val="accent1"/>
-          </a:lnRef>
-          <a:fillRef idx="3">
-            <a:schemeClr val="accent1"/>
-          </a:fillRef>
-          <a:effectRef idx="2">
-            <a:schemeClr val="accent1"/>
-          </a:effectRef>
-          <a:fontRef idx="minor">
-            <a:schemeClr val="lt1"/>
-          </a:fontRef>
-        </p:style>
-        <p:txBody>
-          <a:bodyPr rtlCol="0" anchor="ctr"/>
-          <a:lstStyle/>
-          <a:p>
-            <a:pPr algn="ctr"/>
-            <a:endParaRPr/>
+          <p:cNvSpPr>
+            <a:spLocks noGrp="1" noRot="1" noChangeAspect="1" noMove="1" noResize="1" noEditPoints="1" noAdjustHandles="1" noChangeArrowheads="1" noChangeShapeType="1" noTextEdit="1"/>
+          </p:cNvSpPr>
+          <p:nvPr>
+            <p:extLst>
+              <p:ext uri="{386F3935-93C4-4BCD-93E2-E3B085C9AB24}">
+                <p16:designElem xmlns:p16="http://schemas.microsoft.com/office/powerpoint/2015/main" val="1"/>
+              </p:ext>
+            </p:extLst>
+          </p:nvPr>
+        </p:nvSpPr>
+        <p:spPr>
+          <a:xfrm>
+            <a:off x="476887" y="487090"/>
+            <a:ext cx="6740094" cy="5897880"/>
+          </a:xfrm>
+          <a:prstGeom prst="rect">
+            <a:avLst/>
+          </a:prstGeom>
+          <a:solidFill>
+            <a:srgbClr val="FFFFFF"/>
+          </a:solidFill>
+          <a:ln w="19050">
+            <a:solidFill>
+              <a:schemeClr val="tx1">
+                <a:lumMod val="50000"/>
+                <a:lumOff val="50000"/>
+                <a:alpha val="80000"/>
+              </a:schemeClr>
+            </a:solidFill>
+          </a:ln>
+        </p:spPr>
+        <p:style>
+          <a:lnRef idx="2">
+            <a:schemeClr val="accent1">
+              <a:shade val="50000"/>
+            </a:schemeClr>
+          </a:lnRef>
+          <a:fillRef idx="1">
+            <a:schemeClr val="accent1"/>
+          </a:fillRef>
+          <a:effectRef idx="0">
+            <a:schemeClr val="accent1"/>
+          </a:effectRef>
+          <a:fontRef idx="minor">
+            <a:schemeClr val="lt1"/>
+          </a:fontRef>
+        </p:style>
+        <p:txBody>
+          <a:bodyPr rtlCol="0" anchor="ctr"/>
+          <a:lstStyle/>
+          <a:p>
+            <a:pPr algn="ctr"/>
+            <a:endParaRPr lang="en-US"/>
+          </a:p>
+        </p:txBody>
+      </p:sp>
+      <p:pic>
+        <p:nvPicPr>
+          <p:cNvPr id="11" name="Resim 10">
+            <a:extLst>
+              <a:ext uri="{FF2B5EF4-FFF2-40B4-BE49-F238E27FC236}">
+                <a16:creationId xmlns:a16="http://schemas.microsoft.com/office/drawing/2014/main" id="{A7ECC37F-CB5B-6CBC-9A22-A05080EA55BE}"/>
+              </a:ext>
+            </a:extLst>
+          </p:cNvPr>
+          <p:cNvPicPr>
+            <a:picLocks noChangeAspect="1"/>
+          </p:cNvPicPr>
+          <p:nvPr/>
+        </p:nvPicPr>
+        <p:blipFill>
+          <a:blip r:embed="rId2"/>
+          <a:stretch>
+            <a:fillRect/>
+          </a:stretch>
+        </p:blipFill>
+        <p:spPr>
+          <a:xfrm>
+            <a:off x="641013" y="880675"/>
+            <a:ext cx="6408414" cy="5110709"/>
+          </a:xfrm>
+          <a:prstGeom prst="rect">
+            <a:avLst/>
+          </a:prstGeom>
+        </p:spPr>
+      </p:pic>
+      <p:sp>
+        <p:nvSpPr>
+          <p:cNvPr id="37" name="Rectangle 43">
+            <a:extLst>
+              <a:ext uri="{FF2B5EF4-FFF2-40B4-BE49-F238E27FC236}">
+                <a16:creationId xmlns:a16="http://schemas.microsoft.com/office/drawing/2014/main" id="{D7D9F91F-72C9-4DB9-ABD0-A8180D8262D5}"/>
+              </a:ext>
+              <a:ext uri="{C183D7F6-B498-43B3-948B-1728B52AA6E4}">
+                <adec:decorative xmlns:adec="http://schemas.microsoft.com/office/drawing/2017/decorative" val="1"/>
+              </a:ext>
+            </a:extLst>
+          </p:cNvPr>
+          <p:cNvSpPr>
+            <a:spLocks noGrp="1" noRot="1" noChangeAspect="1" noMove="1" noResize="1" noEditPoints="1" noAdjustHandles="1" noChangeArrowheads="1" noChangeShapeType="1" noTextEdit="1"/>
+          </p:cNvSpPr>
+          <p:nvPr>
+            <p:extLst>
+              <p:ext uri="{386F3935-93C4-4BCD-93E2-E3B085C9AB24}">
+                <p16:designElem xmlns:p16="http://schemas.microsoft.com/office/powerpoint/2015/main" val="1"/>
+              </p:ext>
+            </p:extLst>
+          </p:nvPr>
+        </p:nvSpPr>
+        <p:spPr>
+          <a:xfrm>
+            <a:off x="7532692" y="480060"/>
+            <a:ext cx="4179244" cy="2788074"/>
+          </a:xfrm>
+          <a:prstGeom prst="rect">
+            <a:avLst/>
+          </a:prstGeom>
+          <a:solidFill>
+            <a:srgbClr val="FFFFFF"/>
+          </a:solidFill>
+          <a:ln w="19050">
+            <a:solidFill>
+              <a:schemeClr val="tx1">
+                <a:lumMod val="50000"/>
+                <a:lumOff val="50000"/>
+                <a:alpha val="80000"/>
+              </a:schemeClr>
+            </a:solidFill>
+          </a:ln>
+        </p:spPr>
+        <p:style>
+          <a:lnRef idx="2">
+            <a:schemeClr val="accent1">
+              <a:shade val="50000"/>
+            </a:schemeClr>
+          </a:lnRef>
+          <a:fillRef idx="1">
+            <a:schemeClr val="accent1"/>
+          </a:fillRef>
+          <a:effectRef idx="0">
+            <a:schemeClr val="accent1"/>
+          </a:effectRef>
+          <a:fontRef idx="minor">
+            <a:schemeClr val="lt1"/>
+          </a:fontRef>
+        </p:style>
+        <p:txBody>
+          <a:bodyPr rtlCol="0" anchor="ctr"/>
+          <a:lstStyle/>
+          <a:p>
+            <a:pPr algn="ctr"/>
+            <a:endParaRPr lang="en-US"/>
+          </a:p>
+        </p:txBody>
+      </p:sp>
+      <p:pic>
+        <p:nvPicPr>
+          <p:cNvPr id="35" name="Resim 34">
+            <a:extLst>
+              <a:ext uri="{FF2B5EF4-FFF2-40B4-BE49-F238E27FC236}">
+                <a16:creationId xmlns:a16="http://schemas.microsoft.com/office/drawing/2014/main" id="{EC0E1047-06CF-F96B-FBFB-998C6A5C8623}"/>
+              </a:ext>
+            </a:extLst>
+          </p:cNvPr>
+          <p:cNvPicPr>
+            <a:picLocks noChangeAspect="1"/>
+          </p:cNvPicPr>
+          <p:nvPr/>
+        </p:nvPicPr>
+        <p:blipFill>
+          <a:blip r:embed="rId3"/>
+          <a:stretch>
+            <a:fillRect/>
+          </a:stretch>
+        </p:blipFill>
+        <p:spPr>
+          <a:xfrm>
+            <a:off x="7693868" y="686572"/>
+            <a:ext cx="3853941" cy="2389443"/>
+          </a:xfrm>
+          <a:prstGeom prst="rect">
+            <a:avLst/>
+          </a:prstGeom>
+        </p:spPr>
+      </p:pic>
+      <p:sp>
+        <p:nvSpPr>
+          <p:cNvPr id="46" name="Rectangle 45">
+            <a:extLst>
+              <a:ext uri="{FF2B5EF4-FFF2-40B4-BE49-F238E27FC236}">
+                <a16:creationId xmlns:a16="http://schemas.microsoft.com/office/drawing/2014/main" id="{BE016956-CE9F-4946-8834-A8BC3529D0F6}"/>
+              </a:ext>
+              <a:ext uri="{C183D7F6-B498-43B3-948B-1728B52AA6E4}">
+                <adec:decorative xmlns:adec="http://schemas.microsoft.com/office/drawing/2017/decorative" val="1"/>
+              </a:ext>
+            </a:extLst>
+          </p:cNvPr>
+          <p:cNvSpPr>
+            <a:spLocks noGrp="1" noRot="1" noChangeAspect="1" noMove="1" noResize="1" noEditPoints="1" noAdjustHandles="1" noChangeArrowheads="1" noChangeShapeType="1" noTextEdit="1"/>
+          </p:cNvSpPr>
+          <p:nvPr>
+            <p:extLst>
+              <p:ext uri="{386F3935-93C4-4BCD-93E2-E3B085C9AB24}">
+                <p16:designElem xmlns:p16="http://schemas.microsoft.com/office/powerpoint/2015/main" val="1"/>
+              </p:ext>
+            </p:extLst>
+          </p:nvPr>
+        </p:nvSpPr>
+        <p:spPr>
+          <a:xfrm>
+            <a:off x="7532692" y="3603670"/>
+            <a:ext cx="4179244" cy="2788074"/>
+          </a:xfrm>
+          <a:prstGeom prst="rect">
+            <a:avLst/>
+          </a:prstGeom>
+          <a:solidFill>
+            <a:srgbClr val="FFFFFF"/>
+          </a:solidFill>
+          <a:ln w="19050">
+            <a:solidFill>
+              <a:schemeClr val="tx1">
+                <a:lumMod val="50000"/>
+                <a:lumOff val="50000"/>
+                <a:alpha val="80000"/>
+              </a:schemeClr>
+            </a:solidFill>
+          </a:ln>
+        </p:spPr>
+        <p:style>
+          <a:lnRef idx="2">
+            <a:schemeClr val="accent1">
+              <a:shade val="50000"/>
+            </a:schemeClr>
+          </a:lnRef>
+          <a:fillRef idx="1">
+            <a:schemeClr val="accent1"/>
+          </a:fillRef>
+          <a:effectRef idx="0">
+            <a:schemeClr val="accent1"/>
+          </a:effectRef>
+          <a:fontRef idx="minor">
+            <a:schemeClr val="lt1"/>
+          </a:fontRef>
+        </p:style>
+        <p:txBody>
+          <a:bodyPr rtlCol="0" anchor="ctr"/>
+          <a:lstStyle/>
+          <a:p>
+            <a:pPr algn="ctr"/>
+            <a:endParaRPr lang="en-US"/>
           </a:p>
         </p:txBody>
       </p:sp>
@@ -50479,54 +50942,53 @@
           <p:nvPr/>
         </p:nvPicPr>
         <p:blipFill>
-          <a:blip r:embed="rId2"/>
+          <a:blip r:embed="rId4"/>
           <a:stretch>
             <a:fillRect/>
           </a:stretch>
         </p:blipFill>
         <p:spPr>
           <a:xfrm>
-            <a:off x="490220" y="1201566"/>
-            <a:ext cx="7315199" cy="2053943"/>
+            <a:off x="7693868" y="4444458"/>
+            <a:ext cx="3853941" cy="1079103"/>
           </a:xfrm>
           <a:prstGeom prst="rect">
             <a:avLst/>
           </a:prstGeom>
         </p:spPr>
       </p:pic>
-      <p:pic>
-        <p:nvPicPr>
-          <p:cNvPr id="35" name="Resim 34">
+      <p:sp>
+        <p:nvSpPr>
+          <p:cNvPr id="9" name="Metin kutusu 8">
             <a:extLst>
               <a:ext uri="{FF2B5EF4-FFF2-40B4-BE49-F238E27FC236}">
-                <a16:creationId xmlns:a16="http://schemas.microsoft.com/office/drawing/2014/main" id="{EC0E1047-06CF-F96B-FBFB-998C6A5C8623}"/>
+                <a16:creationId xmlns:a16="http://schemas.microsoft.com/office/drawing/2014/main" id="{9D10CC61-A0C0-93F1-FFFF-899CD7925A40}"/>
               </a:ext>
             </a:extLst>
           </p:cNvPr>
-          <p:cNvPicPr>
-            <a:picLocks noChangeAspect="1"/>
-          </p:cNvPicPr>
-          <p:nvPr/>
-        </p:nvPicPr>
-        <p:blipFill>
-          <a:blip r:embed="rId3"/>
-          <a:stretch>
-            <a:fillRect/>
-          </a:stretch>
-        </p:blipFill>
-        <p:spPr>
-          <a:xfrm>
-            <a:off x="7035883" y="3491729"/>
-            <a:ext cx="4507695" cy="2794771"/>
-          </a:xfrm>
-          <a:prstGeom prst="rect">
-            <a:avLst/>
-          </a:prstGeom>
-          <a:ln>
-            <a:noFill/>
-          </a:ln>
-        </p:spPr>
-      </p:pic>
+          <p:cNvSpPr txBox="1"/>
+          <p:nvPr/>
+        </p:nvSpPr>
+        <p:spPr>
+          <a:xfrm>
+            <a:off x="3048000" y="3246792"/>
+            <a:ext cx="6096000" cy="369332"/>
+          </a:xfrm>
+          <a:prstGeom prst="rect">
+            <a:avLst/>
+          </a:prstGeom>
+          <a:noFill/>
+        </p:spPr>
+        <p:txBody>
+          <a:bodyPr wrap="square">
+            <a:spAutoFit/>
+          </a:bodyPr>
+          <a:lstStyle/>
+          <a:p>
+            <a:endParaRPr lang="tr-TR" dirty="0"/>
+          </a:p>
+        </p:txBody>
+      </p:sp>
     </p:spTree>
     <p:extLst>
       <p:ext uri="{BB962C8B-B14F-4D97-AF65-F5344CB8AC3E}">
